--- a/dist/초5/국어/독서와추론/초5_국어_독서와추론_03_구조에따라요약하기_학생용.pptx
+++ b/dist/초5/국어/독서와추론/초5_국어_독서와추론_03_구조에따라요약하기_학생용.pptx
@@ -119,13 +119,13 @@
   <p:extLst>
     <p:ext uri="{521415D9-36F7-43E2-AB2F-B90AF26B5E84}">
       <p14:sectionLst xmlns:p14="http://schemas.microsoft.com/office/powerpoint/2010/main">
-        <p14:section name="도입" id="{40c1e8d8-93ec-893f-6d23-8e7ef96fc6ca}">
+        <p14:section name="도입" id="{a5fd1992-cd08-2a42-46f8-216acf745699}">
           <p14:sldIdLst>
             <p14:sldId id="256"/>
             <p14:sldId id="257"/>
           </p14:sldIdLst>
         </p14:section>
-        <p14:section name="개념" id="{de85eeeb-a89e-4944-e448-9860efeb8b60}">
+        <p14:section name="개념" id="{69976632-d049-b1d5-bc3e-6fbd1efb0de2}">
           <p14:sldIdLst>
             <p14:sldId id="258"/>
             <p14:sldId id="259"/>
@@ -133,25 +133,25 @@
             <p14:sldId id="261"/>
           </p14:sldIdLst>
         </p14:section>
-        <p14:section name="연습" id="{f8d7b5d2-41be-7f64-ccf0-fc62054f2708}">
+        <p14:section name="연습" id="{537ff84b-1e66-bc2f-c1ab-9ddf86b7884d}">
           <p14:sldIdLst>
             <p14:sldId id="262"/>
             <p14:sldId id="263"/>
             <p14:sldId id="264"/>
           </p14:sldIdLst>
         </p14:section>
-        <p14:section name="확인" id="{90144773-3d4b-34a5-e5c3-139c080f9586}">
+        <p14:section name="확인" id="{3e391cc8-9522-c75f-e8ab-bd7c410da258}">
           <p14:sldIdLst>
             <p14:sldId id="265"/>
             <p14:sldId id="266"/>
           </p14:sldIdLst>
         </p14:section>
-        <p14:section name="정리" id="{aa66be73-2a04-7ad2-c9d8-fc504ebf77e4}">
+        <p14:section name="정리" id="{563a8960-5589-2e30-e12d-ab8c9a4d7486}">
           <p14:sldIdLst>
             <p14:sldId id="267"/>
           </p14:sldIdLst>
         </p14:section>
-        <p14:section name="보충" id="{93802608-f9fb-dd69-157e-7793e5ef82ea}">
+        <p14:section name="보충" id="{68eb97bb-1f0a-4571-7df7-03eb3e388e5f}">
           <p14:sldIdLst>
             <p14:sldId id="268"/>
           </p14:sldIdLst>
